--- a/results/cifar10_positional_8models/reports/cifar10_positional_8models_report/cifar10_positional_8models_report.pptx
+++ b/results/cifar10_positional_8models/reports/cifar10_positional_8models_report/cifar10_positional_8models_report.pptx
@@ -3350,7 +3350,7 @@
                 </a:solidFill>
                 <a:latin typeface="Aptos"/>
               </a:rPr>
-              <a:t>ViT No Pos</a:t>
+              <a:t>ViT Baseline (No Pos)</a:t>
             </a:r>
           </a:p>
         </p:txBody>
@@ -3440,7 +3440,7 @@
                 </a:solidFill>
                 <a:latin typeface="Aptos"/>
               </a:rPr>
-              <a:t>ViT Baseline</a:t>
+              <a:t>ViT Learnable Position</a:t>
             </a:r>
           </a:p>
         </p:txBody>
@@ -3530,7 +3530,7 @@
                 </a:solidFill>
                 <a:latin typeface="Aptos"/>
               </a:rPr>
-              <a:t>ViT Row-wise</a:t>
+              <a:t>ViT Row-wise Sinusoidal</a:t>
             </a:r>
           </a:p>
         </p:txBody>
@@ -3620,7 +3620,7 @@
                 </a:solidFill>
                 <a:latin typeface="Aptos"/>
               </a:rPr>
-              <a:t>ViT Column-wise</a:t>
+              <a:t>ViT Column-wise Sinusoidal</a:t>
             </a:r>
           </a:p>
         </p:txBody>
@@ -3771,7 +3771,7 @@
                 </a:solidFill>
                 <a:latin typeface="Aptos"/>
               </a:rPr>
-              <a:t>Reference run: ViT No Pos</a:t>
+              <a:t>Reference run: ViT Baseline (No Pos)</a:t>
             </a:r>
           </a:p>
           <a:p>
@@ -3854,7 +3854,7 @@
                 </a:solidFill>
                 <a:latin typeface="Aptos"/>
               </a:rPr>
-              <a:t>Generated 2026-07-02 13:01</a:t>
+              <a:t>Generated 2026-07-04 15:12</a:t>
             </a:r>
           </a:p>
         </p:txBody>
@@ -4249,7 +4249,7 @@
                           </a:solidFill>
                           <a:latin typeface="Aptos"/>
                         </a:rPr>
-                        <a:t>ViT Additive</a:t>
+                        <a:t>ViT Additive Sinusoidal</a:t>
                       </a:r>
                     </a:p>
                   </a:txBody>
@@ -4276,7 +4276,7 @@
                           </a:solidFill>
                           <a:latin typeface="Aptos"/>
                         </a:rPr>
-                        <a:t>ViT Additive Shifted</a:t>
+                        <a:t>ViT Additive Sinusoidal Shifted</a:t>
                       </a:r>
                     </a:p>
                   </a:txBody>
@@ -4303,7 +4303,7 @@
                           </a:solidFill>
                           <a:latin typeface="Aptos"/>
                         </a:rPr>
-                        <a:t>ViT Multiplicative</a:t>
+                        <a:t>ViT Multiplicative Sinusoidal</a:t>
                       </a:r>
                     </a:p>
                   </a:txBody>
@@ -4330,7 +4330,7 @@
                           </a:solidFill>
                           <a:latin typeface="Aptos"/>
                         </a:rPr>
-                        <a:t>ViT Multiplicative Shifted</a:t>
+                        <a:t>ViT Multiplicative Sinusoidal Shifted</a:t>
                       </a:r>
                     </a:p>
                   </a:txBody>
@@ -6127,7 +6127,7 @@
                           </a:solidFill>
                           <a:latin typeface="Aptos"/>
                         </a:rPr>
-                        <a:t>ViT Baseline</a:t>
+                        <a:t>ViT Learnable Position</a:t>
                       </a:r>
                     </a:p>
                   </a:txBody>
@@ -6210,7 +6210,7 @@
                           </a:solidFill>
                           <a:latin typeface="Aptos"/>
                         </a:rPr>
-                        <a:t>ViT Baseline</a:t>
+                        <a:t>ViT Learnable Position</a:t>
                       </a:r>
                     </a:p>
                   </a:txBody>
@@ -6293,7 +6293,7 @@
                           </a:solidFill>
                           <a:latin typeface="Aptos"/>
                         </a:rPr>
-                        <a:t>ViT Multiplicative</a:t>
+                        <a:t>ViT Multiplicative Sinusoidal</a:t>
                       </a:r>
                     </a:p>
                   </a:txBody>
@@ -6376,7 +6376,7 @@
                           </a:solidFill>
                           <a:latin typeface="Aptos"/>
                         </a:rPr>
-                        <a:t>ViT Multiplicative</a:t>
+                        <a:t>ViT Multiplicative Sinusoidal</a:t>
                       </a:r>
                     </a:p>
                   </a:txBody>
@@ -6459,7 +6459,7 @@
                           </a:solidFill>
                           <a:latin typeface="Aptos"/>
                         </a:rPr>
-                        <a:t>ViT Row-wise</a:t>
+                        <a:t>ViT Row-wise Sinusoidal</a:t>
                       </a:r>
                     </a:p>
                   </a:txBody>
@@ -6542,7 +6542,7 @@
                           </a:solidFill>
                           <a:latin typeface="Aptos"/>
                         </a:rPr>
-                        <a:t>ViT Baseline</a:t>
+                        <a:t>ViT Learnable Position</a:t>
                       </a:r>
                     </a:p>
                   </a:txBody>
@@ -6625,7 +6625,7 @@
                           </a:solidFill>
                           <a:latin typeface="Aptos"/>
                         </a:rPr>
-                        <a:t>ViT Baseline</a:t>
+                        <a:t>ViT Learnable Position</a:t>
                       </a:r>
                     </a:p>
                   </a:txBody>
@@ -6708,7 +6708,7 @@
                           </a:solidFill>
                           <a:latin typeface="Aptos"/>
                         </a:rPr>
-                        <a:t>ViT Baseline</a:t>
+                        <a:t>ViT Learnable Position</a:t>
                       </a:r>
                     </a:p>
                   </a:txBody>
@@ -7113,7 +7113,7 @@
                           </a:solidFill>
                           <a:latin typeface="Aptos"/>
                         </a:rPr>
-                        <a:t>ViT No Pos</a:t>
+                        <a:t>ViT Baseline (No Pos)</a:t>
                       </a:r>
                     </a:p>
                   </a:txBody>
@@ -7140,7 +7140,7 @@
                           </a:solidFill>
                           <a:latin typeface="Aptos"/>
                         </a:rPr>
-                        <a:t>ViT Baseline</a:t>
+                        <a:t>ViT Learnable Position</a:t>
                       </a:r>
                     </a:p>
                   </a:txBody>
@@ -7167,7 +7167,7 @@
                           </a:solidFill>
                           <a:latin typeface="Aptos"/>
                         </a:rPr>
-                        <a:t>ViT Row-wise</a:t>
+                        <a:t>ViT Row-wise Sinusoidal</a:t>
                       </a:r>
                     </a:p>
                   </a:txBody>
@@ -7194,7 +7194,7 @@
                           </a:solidFill>
                           <a:latin typeface="Aptos"/>
                         </a:rPr>
-                        <a:t>ViT Column-wise</a:t>
+                        <a:t>ViT Column-wise Sinusoidal</a:t>
                       </a:r>
                     </a:p>
                   </a:txBody>
@@ -8255,7 +8255,7 @@
                           </a:solidFill>
                           <a:latin typeface="Aptos"/>
                         </a:rPr>
-                        <a:t>ViT Additive</a:t>
+                        <a:t>ViT Additive Sinusoidal</a:t>
                       </a:r>
                     </a:p>
                   </a:txBody>
@@ -8282,7 +8282,7 @@
                           </a:solidFill>
                           <a:latin typeface="Aptos"/>
                         </a:rPr>
-                        <a:t>ViT Additive Shifted</a:t>
+                        <a:t>ViT Additive Sinusoidal Shifted</a:t>
                       </a:r>
                     </a:p>
                   </a:txBody>
@@ -8309,7 +8309,7 @@
                           </a:solidFill>
                           <a:latin typeface="Aptos"/>
                         </a:rPr>
-                        <a:t>ViT Multiplicative</a:t>
+                        <a:t>ViT Multiplicative Sinusoidal</a:t>
                       </a:r>
                     </a:p>
                   </a:txBody>
@@ -8336,7 +8336,7 @@
                           </a:solidFill>
                           <a:latin typeface="Aptos"/>
                         </a:rPr>
-                        <a:t>ViT Multiplicative Shifted</a:t>
+                        <a:t>ViT Multiplicative Sinusoidal Shifted</a:t>
                       </a:r>
                     </a:p>
                   </a:txBody>
@@ -9477,7 +9477,7 @@
                           </a:solidFill>
                           <a:latin typeface="Aptos"/>
                         </a:rPr>
-                        <a:t>ViT Baseline</a:t>
+                        <a:t>ViT Learnable Position</a:t>
                       </a:r>
                     </a:p>
                   </a:txBody>
@@ -9560,7 +9560,7 @@
                           </a:solidFill>
                           <a:latin typeface="Aptos"/>
                         </a:rPr>
-                        <a:t>ViT Baseline</a:t>
+                        <a:t>ViT Learnable Position</a:t>
                       </a:r>
                     </a:p>
                   </a:txBody>
@@ -9643,7 +9643,7 @@
                           </a:solidFill>
                           <a:latin typeface="Aptos"/>
                         </a:rPr>
-                        <a:t>ViT Baseline</a:t>
+                        <a:t>ViT Learnable Position</a:t>
                       </a:r>
                     </a:p>
                   </a:txBody>
@@ -9726,7 +9726,7 @@
                           </a:solidFill>
                           <a:latin typeface="Aptos"/>
                         </a:rPr>
-                        <a:t>ViT Baseline</a:t>
+                        <a:t>ViT Learnable Position</a:t>
                       </a:r>
                     </a:p>
                   </a:txBody>
@@ -10131,7 +10131,7 @@
                           </a:solidFill>
                           <a:latin typeface="Aptos"/>
                         </a:rPr>
-                        <a:t>ViT No Pos</a:t>
+                        <a:t>ViT Baseline (No Pos)</a:t>
                       </a:r>
                     </a:p>
                   </a:txBody>
@@ -10158,7 +10158,7 @@
                           </a:solidFill>
                           <a:latin typeface="Aptos"/>
                         </a:rPr>
-                        <a:t>ViT Baseline</a:t>
+                        <a:t>ViT Learnable Position</a:t>
                       </a:r>
                     </a:p>
                   </a:txBody>
@@ -10185,7 +10185,7 @@
                           </a:solidFill>
                           <a:latin typeface="Aptos"/>
                         </a:rPr>
-                        <a:t>ViT Row-wise</a:t>
+                        <a:t>ViT Row-wise Sinusoidal</a:t>
                       </a:r>
                     </a:p>
                   </a:txBody>
@@ -10212,7 +10212,7 @@
                           </a:solidFill>
                           <a:latin typeface="Aptos"/>
                         </a:rPr>
-                        <a:t>ViT Column-wise</a:t>
+                        <a:t>ViT Column-wise Sinusoidal</a:t>
                       </a:r>
                     </a:p>
                   </a:txBody>
@@ -11601,7 +11601,7 @@
                           </a:solidFill>
                           <a:latin typeface="Aptos"/>
                         </a:rPr>
-                        <a:t>ViT Additive</a:t>
+                        <a:t>ViT Additive Sinusoidal</a:t>
                       </a:r>
                     </a:p>
                   </a:txBody>
@@ -11628,7 +11628,7 @@
                           </a:solidFill>
                           <a:latin typeface="Aptos"/>
                         </a:rPr>
-                        <a:t>ViT Additive Shifted</a:t>
+                        <a:t>ViT Additive Sinusoidal Shifted</a:t>
                       </a:r>
                     </a:p>
                   </a:txBody>
@@ -11655,7 +11655,7 @@
                           </a:solidFill>
                           <a:latin typeface="Aptos"/>
                         </a:rPr>
-                        <a:t>ViT Multiplicative</a:t>
+                        <a:t>ViT Multiplicative Sinusoidal</a:t>
                       </a:r>
                     </a:p>
                   </a:txBody>
@@ -11682,7 +11682,7 @@
                           </a:solidFill>
                           <a:latin typeface="Aptos"/>
                         </a:rPr>
-                        <a:t>ViT Multiplicative Shifted</a:t>
+                        <a:t>ViT Multiplicative Sinusoidal Shifted</a:t>
                       </a:r>
                     </a:p>
                   </a:txBody>
@@ -13151,7 +13151,7 @@
                           </a:solidFill>
                           <a:latin typeface="Aptos"/>
                         </a:rPr>
-                        <a:t>ViT Baseline</a:t>
+                        <a:t>ViT Learnable Position</a:t>
                       </a:r>
                     </a:p>
                   </a:txBody>
@@ -13234,7 +13234,7 @@
                           </a:solidFill>
                           <a:latin typeface="Aptos"/>
                         </a:rPr>
-                        <a:t>ViT Baseline</a:t>
+                        <a:t>ViT Learnable Position</a:t>
                       </a:r>
                     </a:p>
                   </a:txBody>
@@ -13317,7 +13317,7 @@
                           </a:solidFill>
                           <a:latin typeface="Aptos"/>
                         </a:rPr>
-                        <a:t>ViT Baseline</a:t>
+                        <a:t>ViT Learnable Position</a:t>
                       </a:r>
                     </a:p>
                   </a:txBody>
@@ -13400,7 +13400,7 @@
                           </a:solidFill>
                           <a:latin typeface="Aptos"/>
                         </a:rPr>
-                        <a:t>ViT Baseline</a:t>
+                        <a:t>ViT Learnable Position</a:t>
                       </a:r>
                     </a:p>
                   </a:txBody>
@@ -13483,7 +13483,7 @@
                           </a:solidFill>
                           <a:latin typeface="Aptos"/>
                         </a:rPr>
-                        <a:t>ViT Baseline</a:t>
+                        <a:t>ViT Learnable Position</a:t>
                       </a:r>
                     </a:p>
                   </a:txBody>
@@ -13566,7 +13566,7 @@
                           </a:solidFill>
                           <a:latin typeface="Aptos"/>
                         </a:rPr>
-                        <a:t>ViT Baseline</a:t>
+                        <a:t>ViT Learnable Position</a:t>
                       </a:r>
                     </a:p>
                   </a:txBody>
@@ -14067,7 +14067,7 @@
                 </a:solidFill>
                 <a:latin typeface="Aptos"/>
               </a:rPr>
-              <a:t>Best Test Macro F1 snapshot: ViT Baseline (78.79%).</a:t>
+              <a:t>Best Test Macro F1 snapshot: ViT Learnable Position (78.79%).</a:t>
             </a:r>
           </a:p>
           <a:p>
@@ -14086,7 +14086,7 @@
                 </a:solidFill>
                 <a:latin typeface="Aptos"/>
               </a:rPr>
-              <a:t>Best selected Test Macro Precision: ViT Baseline (78.79%).</a:t>
+              <a:t>Best selected Test Macro Precision: ViT Learnable Position (78.79%).</a:t>
             </a:r>
           </a:p>
           <a:p>
@@ -14105,7 +14105,7 @@
                 </a:solidFill>
                 <a:latin typeface="Aptos"/>
               </a:rPr>
-              <a:t>Best selected Test Macro Recall: ViT Baseline (78.88%).</a:t>
+              <a:t>Best selected Test Macro Recall: ViT Learnable Position (78.88%).</a:t>
             </a:r>
           </a:p>
         </p:txBody>
@@ -14472,7 +14472,7 @@
                           </a:solidFill>
                           <a:latin typeface="Aptos"/>
                         </a:rPr>
-                        <a:t>ViT No Pos</a:t>
+                        <a:t>ViT Baseline (No Pos)</a:t>
                       </a:r>
                     </a:p>
                   </a:txBody>
@@ -14499,7 +14499,7 @@
                           </a:solidFill>
                           <a:latin typeface="Aptos"/>
                         </a:rPr>
-                        <a:t>ViT Baseline</a:t>
+                        <a:t>ViT Learnable Position</a:t>
                       </a:r>
                     </a:p>
                   </a:txBody>
@@ -14526,7 +14526,7 @@
                           </a:solidFill>
                           <a:latin typeface="Aptos"/>
                         </a:rPr>
-                        <a:t>ViT Row-wise</a:t>
+                        <a:t>ViT Row-wise Sinusoidal</a:t>
                       </a:r>
                     </a:p>
                   </a:txBody>
@@ -14553,7 +14553,7 @@
                           </a:solidFill>
                           <a:latin typeface="Aptos"/>
                         </a:rPr>
-                        <a:t>ViT Column-wise</a:t>
+                        <a:t>ViT Column-wise Sinusoidal</a:t>
                       </a:r>
                     </a:p>
                   </a:txBody>
@@ -14746,7 +14746,7 @@
                           </a:solidFill>
                           <a:latin typeface="Aptos"/>
                         </a:rPr>
-                        <a:t>vit_no_pos_cifar10_seed42</a:t>
+                        <a:t>vit_baseline_cifar10_seed42</a:t>
                       </a:r>
                     </a:p>
                   </a:txBody>
@@ -14773,7 +14773,7 @@
                           </a:solidFill>
                           <a:latin typeface="Aptos"/>
                         </a:rPr>
-                        <a:t>vit_baseline_cifar10_seed42</a:t>
+                        <a:t>vit_learnable_position_cifar10_seed42</a:t>
                       </a:r>
                     </a:p>
                   </a:txBody>
@@ -15262,7 +15262,7 @@
                 </a:solidFill>
                 <a:latin typeface="Aptos"/>
               </a:rPr>
-              <a:t>ViT No Pos</a:t>
+              <a:t>ViT Baseline (No Pos)</a:t>
             </a:r>
           </a:p>
         </p:txBody>
@@ -15304,7 +15304,7 @@
                 </a:solidFill>
                 <a:latin typeface="Aptos"/>
               </a:rPr>
-              <a:t>Run ID: vit_no_pos_cifar10_seed42</a:t>
+              <a:t>Run ID: vit_baseline_cifar10_seed42</a:t>
             </a:r>
           </a:p>
           <a:p>
@@ -15323,7 +15323,7 @@
                 </a:solidFill>
                 <a:latin typeface="Aptos"/>
               </a:rPr>
-              <a:t>Model / device: ViT No Pos / cuda</a:t>
+              <a:t>Model / device: ViT Baseline (No Pos) / cuda</a:t>
             </a:r>
           </a:p>
           <a:p>
@@ -15361,7 +15361,7 @@
                 </a:solidFill>
                 <a:latin typeface="Aptos"/>
               </a:rPr>
-              <a:t>Family / variant: ViT / No Pos</a:t>
+              <a:t>Family / variant: ViT / Baseline (No Pos)</a:t>
             </a:r>
           </a:p>
           <a:p>
@@ -15532,7 +15532,7 @@
                 </a:solidFill>
                 <a:latin typeface="Aptos"/>
               </a:rPr>
-              <a:t>ViT Baseline</a:t>
+              <a:t>ViT Learnable Position</a:t>
             </a:r>
           </a:p>
         </p:txBody>
@@ -15574,7 +15574,7 @@
                 </a:solidFill>
                 <a:latin typeface="Aptos"/>
               </a:rPr>
-              <a:t>Run ID: vit_baseline_cifar10_seed42</a:t>
+              <a:t>Run ID: vit_learnable_position_cifar10_seed42</a:t>
             </a:r>
           </a:p>
           <a:p>
@@ -15593,7 +15593,7 @@
                 </a:solidFill>
                 <a:latin typeface="Aptos"/>
               </a:rPr>
-              <a:t>Model / device: ViT Baseline / cuda</a:t>
+              <a:t>Model / device: ViT Learnable Position / cuda</a:t>
             </a:r>
           </a:p>
           <a:p>
@@ -15631,7 +15631,7 @@
                 </a:solidFill>
                 <a:latin typeface="Aptos"/>
               </a:rPr>
-              <a:t>Family / variant: ViT / Baseline</a:t>
+              <a:t>Family / variant: ViT / Learnable Position</a:t>
             </a:r>
           </a:p>
           <a:p>
@@ -15802,7 +15802,7 @@
                 </a:solidFill>
                 <a:latin typeface="Aptos"/>
               </a:rPr>
-              <a:t>ViT Row-wise</a:t>
+              <a:t>ViT Row-wise Sinusoidal</a:t>
             </a:r>
           </a:p>
         </p:txBody>
@@ -16072,7 +16072,7 @@
                 </a:solidFill>
                 <a:latin typeface="Aptos"/>
               </a:rPr>
-              <a:t>ViT Column-wise</a:t>
+              <a:t>ViT Column-wise Sinusoidal</a:t>
             </a:r>
           </a:p>
         </p:txBody>
@@ -16621,7 +16621,7 @@
                           </a:solidFill>
                           <a:latin typeface="Aptos"/>
                         </a:rPr>
-                        <a:t>ViT Additive</a:t>
+                        <a:t>ViT Additive Sinusoidal</a:t>
                       </a:r>
                     </a:p>
                   </a:txBody>
@@ -16648,7 +16648,7 @@
                           </a:solidFill>
                           <a:latin typeface="Aptos"/>
                         </a:rPr>
-                        <a:t>ViT Additive Shifted</a:t>
+                        <a:t>ViT Additive Sinusoidal Shifted</a:t>
                       </a:r>
                     </a:p>
                   </a:txBody>
@@ -16675,7 +16675,7 @@
                           </a:solidFill>
                           <a:latin typeface="Aptos"/>
                         </a:rPr>
-                        <a:t>ViT Multiplicative</a:t>
+                        <a:t>ViT Multiplicative Sinusoidal</a:t>
                       </a:r>
                     </a:p>
                   </a:txBody>
@@ -16702,7 +16702,7 @@
                           </a:solidFill>
                           <a:latin typeface="Aptos"/>
                         </a:rPr>
-                        <a:t>ViT Multiplicative Shifted</a:t>
+                        <a:t>ViT Multiplicative Sinusoidal Shifted</a:t>
                       </a:r>
                     </a:p>
                   </a:txBody>
@@ -17392,7 +17392,7 @@
                 </a:solidFill>
                 <a:latin typeface="Aptos"/>
               </a:rPr>
-              <a:t>Best final value: ViT Baseline (78.03%)</a:t>
+              <a:t>Best final value: ViT Learnable Position (78.03%)</a:t>
             </a:r>
           </a:p>
         </p:txBody>
@@ -17506,7 +17506,7 @@
                 </a:solidFill>
                 <a:latin typeface="Aptos"/>
               </a:rPr>
-              <a:t>Best final value: ViT Baseline (78.88%)</a:t>
+              <a:t>Best final value: ViT Learnable Position (78.88%)</a:t>
             </a:r>
           </a:p>
         </p:txBody>
@@ -17912,7 +17912,7 @@
                 </a:solidFill>
                 <a:latin typeface="Aptos"/>
               </a:rPr>
-              <a:t>Best final value: ViT Multiplicative (0.7343)</a:t>
+              <a:t>Best final value: ViT Multiplicative Sinusoidal (0.7343)</a:t>
             </a:r>
           </a:p>
         </p:txBody>
@@ -18026,7 +18026,7 @@
                 </a:solidFill>
                 <a:latin typeface="Aptos"/>
               </a:rPr>
-              <a:t>Best final value: ViT Multiplicative (0.7078)</a:t>
+              <a:t>Best final value: ViT Multiplicative Sinusoidal (0.7078)</a:t>
             </a:r>
           </a:p>
         </p:txBody>
@@ -18432,7 +18432,7 @@
                 </a:solidFill>
                 <a:latin typeface="Aptos"/>
               </a:rPr>
-              <a:t>Best final value: ViT Row-wise (97.86%)</a:t>
+              <a:t>Best final value: ViT Row-wise Sinusoidal (97.86%)</a:t>
             </a:r>
           </a:p>
         </p:txBody>
@@ -18546,7 +18546,7 @@
                 </a:solidFill>
                 <a:latin typeface="Aptos"/>
               </a:rPr>
-              <a:t>Best final value: ViT Baseline (0.0658)</a:t>
+              <a:t>Best final value: ViT Learnable Position (0.0658)</a:t>
             </a:r>
           </a:p>
         </p:txBody>
@@ -18952,7 +18952,7 @@
                 </a:solidFill>
                 <a:latin typeface="Aptos"/>
               </a:rPr>
-              <a:t>Best final value: ViT Baseline (78.85%)</a:t>
+              <a:t>Best final value: ViT Learnable Position (78.85%)</a:t>
             </a:r>
           </a:p>
         </p:txBody>
@@ -19066,7 +19066,7 @@
                 </a:solidFill>
                 <a:latin typeface="Aptos"/>
               </a:rPr>
-              <a:t>Best final value: ViT Baseline (78.05%)</a:t>
+              <a:t>Best final value: ViT Learnable Position (78.05%)</a:t>
             </a:r>
           </a:p>
         </p:txBody>
@@ -19270,7 +19270,7 @@
                 </a:solidFill>
                 <a:latin typeface="Aptos"/>
               </a:rPr>
-              <a:t>Confusion Matrix | ViT No Pos</a:t>
+              <a:t>Confusion Matrix | ViT Baseline (No Pos)</a:t>
             </a:r>
           </a:p>
         </p:txBody>
@@ -19365,7 +19365,7 @@
       </p:sp>
       <p:pic>
         <p:nvPicPr>
-          <p:cNvPr id="7" name="Picture 6" descr="vit_no_pos_cifar10_seed42_confusion_matrix.png"/>
+          <p:cNvPr id="7" name="Picture 6" descr="vit_baseline_cifar10_seed42_confusion_matrix.png"/>
           <p:cNvPicPr>
             <a:picLocks noChangeAspect="1"/>
           </p:cNvPicPr>
@@ -19837,7 +19837,7 @@
                 </a:solidFill>
                 <a:latin typeface="Aptos"/>
               </a:rPr>
-              <a:t>Confusion Matrix | ViT Baseline</a:t>
+              <a:t>Confusion Matrix | ViT Learnable Position</a:t>
             </a:r>
           </a:p>
         </p:txBody>
@@ -19932,7 +19932,7 @@
       </p:sp>
       <p:pic>
         <p:nvPicPr>
-          <p:cNvPr id="7" name="Picture 6" descr="vit_baseline_cifar10_seed42_confusion_matrix.png"/>
+          <p:cNvPr id="7" name="Picture 6" descr="vit_learnable_position_cifar10_seed42_confusion_matrix.png"/>
           <p:cNvPicPr>
             <a:picLocks noChangeAspect="1"/>
           </p:cNvPicPr>
@@ -22326,7 +22326,7 @@
                 </a:solidFill>
                 <a:latin typeface="Aptos"/>
               </a:rPr>
-              <a:t>ViT Additive</a:t>
+              <a:t>ViT Additive Sinusoidal</a:t>
             </a:r>
           </a:p>
         </p:txBody>
@@ -22596,7 +22596,7 @@
                 </a:solidFill>
                 <a:latin typeface="Aptos"/>
               </a:rPr>
-              <a:t>ViT Additive Shifted</a:t>
+              <a:t>ViT Additive Sinusoidal Shifted</a:t>
             </a:r>
           </a:p>
         </p:txBody>
@@ -22866,7 +22866,7 @@
                 </a:solidFill>
                 <a:latin typeface="Aptos"/>
               </a:rPr>
-              <a:t>ViT Multiplicative</a:t>
+              <a:t>ViT Multiplicative Sinusoidal</a:t>
             </a:r>
           </a:p>
         </p:txBody>
@@ -23136,7 +23136,7 @@
                 </a:solidFill>
                 <a:latin typeface="Aptos"/>
               </a:rPr>
-              <a:t>ViT Multiplicative Shifted</a:t>
+              <a:t>ViT Multiplicative Sinusoidal Shifted</a:t>
             </a:r>
           </a:p>
         </p:txBody>
@@ -25510,7 +25510,7 @@
                 </a:solidFill>
                 <a:latin typeface="Aptos"/>
               </a:rPr>
-              <a:t>Highest mean Test Per Class Accuracy: ViT Baseline (78.88%).</a:t>
+              <a:t>Highest mean Test Per Class Accuracy: ViT Learnable Position (78.88%).</a:t>
             </a:r>
           </a:p>
           <a:p>
@@ -26020,7 +26020,7 @@
                 </a:solidFill>
                 <a:latin typeface="Aptos"/>
               </a:rPr>
-              <a:t>Highest mean Test Per Class F1: ViT Baseline (78.79%).</a:t>
+              <a:t>Highest mean Test Per Class F1: ViT Learnable Position (78.79%).</a:t>
             </a:r>
           </a:p>
           <a:p>
@@ -26530,7 +26530,7 @@
                 </a:solidFill>
                 <a:latin typeface="Aptos"/>
               </a:rPr>
-              <a:t>Highest mean Test Per Class Precision: ViT Baseline (78.79%).</a:t>
+              <a:t>Highest mean Test Per Class Precision: ViT Learnable Position (78.79%).</a:t>
             </a:r>
           </a:p>
           <a:p>
@@ -27040,7 +27040,7 @@
                 </a:solidFill>
                 <a:latin typeface="Aptos"/>
               </a:rPr>
-              <a:t>Highest mean Test Per Class Recall: ViT Baseline (78.88%).</a:t>
+              <a:t>Highest mean Test Per Class Recall: ViT Learnable Position (78.88%).</a:t>
             </a:r>
           </a:p>
           <a:p>
@@ -27393,7 +27393,7 @@
                 </a:solidFill>
                 <a:latin typeface="Aptos"/>
               </a:rPr>
-              <a:t>Current headline result: ViT Baseline leads on Test ACC with 78.03%.</a:t>
+              <a:t>Current headline result: ViT Learnable Position leads on Test ACC with 78.03%.</a:t>
             </a:r>
           </a:p>
           <a:p>
@@ -27412,7 +27412,7 @@
                 </a:solidFill>
                 <a:latin typeface="Aptos"/>
               </a:rPr>
-              <a:t>When presenting baseline vs comparison, use ViT No Pos as reference and report ViT Baseline at +6.61 pp on Test ACC.</a:t>
+              <a:t>When presenting baseline vs comparison, use ViT Baseline (No Pos) as reference and report ViT Learnable Position at +6.61 pp on Test ACC.</a:t>
             </a:r>
           </a:p>
           <a:p>
@@ -27997,7 +27997,7 @@
                 </a:solidFill>
                 <a:latin typeface="Aptos"/>
               </a:rPr>
-              <a:t>Primary comparison metric: Test ACC. Best final result is ViT Baseline with 78.03%.</a:t>
+              <a:t>Primary comparison metric: Test ACC. Best final result is ViT Learnable Position with 78.03%.</a:t>
             </a:r>
           </a:p>
           <a:p>
@@ -28016,7 +28016,7 @@
                 </a:solidFill>
                 <a:latin typeface="Aptos"/>
               </a:rPr>
-              <a:t>Against reference run ViT No Pos, ViT Baseline changes Test ACC by +6.61 pp.</a:t>
+              <a:t>Against reference run ViT Baseline (No Pos), ViT Learnable Position changes Test ACC by +6.61 pp.</a:t>
             </a:r>
           </a:p>
           <a:p>
@@ -28035,7 +28035,7 @@
                 </a:solidFill>
                 <a:latin typeface="Aptos"/>
               </a:rPr>
-              <a:t>Largest train-to-test accuracy gap appears in ViT No Pos (23.58 pp), worth calling out during generalization discussion.</a:t>
+              <a:t>Largest train-to-test accuracy gap appears in ViT Baseline (No Pos) (23.58 pp), worth calling out during generalization discussion.</a:t>
             </a:r>
           </a:p>
           <a:p>
@@ -28054,7 +28054,7 @@
                 </a:solidFill>
                 <a:latin typeface="Aptos"/>
               </a:rPr>
-              <a:t>Early stopping summary: ViT No Pos: stopped early; ViT Baseline: stopped early; ViT Row-wise: stopped early</a:t>
+              <a:t>Early stopping summary: ViT Baseline (No Pos): stopped early; ViT Learnable Position: stopped early; ViT Row-wise Sinusoidal: stopped early</a:t>
             </a:r>
           </a:p>
         </p:txBody>
@@ -28189,7 +28189,7 @@
                 </a:solidFill>
                 <a:latin typeface="Aptos"/>
               </a:rPr>
-              <a:t>ViT Baseline</a:t>
+              <a:t>ViT Learnable Position</a:t>
             </a:r>
           </a:p>
         </p:txBody>
@@ -29127,7 +29127,7 @@
                           </a:solidFill>
                           <a:latin typeface="Aptos"/>
                         </a:rPr>
-                        <a:t>ViT No Pos</a:t>
+                        <a:t>ViT Baseline (No Pos)</a:t>
                       </a:r>
                     </a:p>
                   </a:txBody>
@@ -29154,7 +29154,7 @@
                           </a:solidFill>
                           <a:latin typeface="Aptos"/>
                         </a:rPr>
-                        <a:t>ViT No Pos</a:t>
+                        <a:t>ViT Baseline (No Pos)</a:t>
                       </a:r>
                     </a:p>
                   </a:txBody>
@@ -29208,7 +29208,7 @@
                           </a:solidFill>
                           <a:latin typeface="Aptos"/>
                         </a:rPr>
-                        <a:t>No Pos</a:t>
+                        <a:t>Baseline (No Pos)</a:t>
                       </a:r>
                     </a:p>
                   </a:txBody>
@@ -29318,7 +29318,7 @@
                           </a:solidFill>
                           <a:latin typeface="Aptos"/>
                         </a:rPr>
-                        <a:t>ViT Baseline</a:t>
+                        <a:t>ViT Learnable Position</a:t>
                       </a:r>
                     </a:p>
                   </a:txBody>
@@ -29345,7 +29345,7 @@
                           </a:solidFill>
                           <a:latin typeface="Aptos"/>
                         </a:rPr>
-                        <a:t>ViT Baseline</a:t>
+                        <a:t>ViT Learnable Position</a:t>
                       </a:r>
                     </a:p>
                   </a:txBody>
@@ -29399,7 +29399,7 @@
                           </a:solidFill>
                           <a:latin typeface="Aptos"/>
                         </a:rPr>
-                        <a:t>Baseline</a:t>
+                        <a:t>Learnable Position</a:t>
                       </a:r>
                     </a:p>
                   </a:txBody>
@@ -29509,7 +29509,7 @@
                           </a:solidFill>
                           <a:latin typeface="Aptos"/>
                         </a:rPr>
-                        <a:t>ViT Row-wise</a:t>
+                        <a:t>ViT Row-wise Sinusoidal</a:t>
                       </a:r>
                     </a:p>
                   </a:txBody>
@@ -29700,7 +29700,7 @@
                           </a:solidFill>
                           <a:latin typeface="Aptos"/>
                         </a:rPr>
-                        <a:t>ViT Column-wise</a:t>
+                        <a:t>ViT Column-wise Sinusoidal</a:t>
                       </a:r>
                     </a:p>
                   </a:txBody>
@@ -29891,7 +29891,7 @@
                           </a:solidFill>
                           <a:latin typeface="Aptos"/>
                         </a:rPr>
-                        <a:t>ViT Additive</a:t>
+                        <a:t>ViT Additive Sinusoidal</a:t>
                       </a:r>
                     </a:p>
                   </a:txBody>
@@ -30082,7 +30082,7 @@
                           </a:solidFill>
                           <a:latin typeface="Aptos"/>
                         </a:rPr>
-                        <a:t>ViT Additive Shifted</a:t>
+                        <a:t>ViT Additive Sinusoidal Shifted</a:t>
                       </a:r>
                     </a:p>
                   </a:txBody>
@@ -30273,7 +30273,7 @@
                           </a:solidFill>
                           <a:latin typeface="Aptos"/>
                         </a:rPr>
-                        <a:t>ViT Multiplicative</a:t>
+                        <a:t>ViT Multiplicative Sinusoidal</a:t>
                       </a:r>
                     </a:p>
                   </a:txBody>
@@ -30978,7 +30978,7 @@
                           </a:solidFill>
                           <a:latin typeface="Aptos"/>
                         </a:rPr>
-                        <a:t>ViT Multiplicative Shifted</a:t>
+                        <a:t>ViT Multiplicative Sinusoidal Shifted</a:t>
                       </a:r>
                     </a:p>
                   </a:txBody>
@@ -31711,7 +31711,7 @@
                           </a:solidFill>
                           <a:latin typeface="Aptos"/>
                         </a:rPr>
-                        <a:t>ViT No Pos</a:t>
+                        <a:t>ViT Baseline (No Pos)</a:t>
                       </a:r>
                     </a:p>
                   </a:txBody>
@@ -31738,7 +31738,7 @@
                           </a:solidFill>
                           <a:latin typeface="Aptos"/>
                         </a:rPr>
-                        <a:t>ViT No Pos</a:t>
+                        <a:t>ViT Baseline (No Pos)</a:t>
                       </a:r>
                     </a:p>
                   </a:txBody>
@@ -31765,7 +31765,7 @@
                           </a:solidFill>
                           <a:latin typeface="Aptos"/>
                         </a:rPr>
-                        <a:t>No Pos</a:t>
+                        <a:t>Baseline (No Pos)</a:t>
                       </a:r>
                     </a:p>
                   </a:txBody>
@@ -31929,7 +31929,7 @@
                           </a:solidFill>
                           <a:latin typeface="Aptos"/>
                         </a:rPr>
-                        <a:t>ViT Baseline</a:t>
+                        <a:t>ViT Learnable Position</a:t>
                       </a:r>
                     </a:p>
                   </a:txBody>
@@ -31956,7 +31956,7 @@
                           </a:solidFill>
                           <a:latin typeface="Aptos"/>
                         </a:rPr>
-                        <a:t>ViT Baseline</a:t>
+                        <a:t>ViT Learnable Position</a:t>
                       </a:r>
                     </a:p>
                   </a:txBody>
@@ -31983,7 +31983,7 @@
                           </a:solidFill>
                           <a:latin typeface="Aptos"/>
                         </a:rPr>
-                        <a:t>Baseline</a:t>
+                        <a:t>Learnable Position</a:t>
                       </a:r>
                     </a:p>
                   </a:txBody>
@@ -32147,7 +32147,7 @@
                           </a:solidFill>
                           <a:latin typeface="Aptos"/>
                         </a:rPr>
-                        <a:t>ViT Row-wise</a:t>
+                        <a:t>ViT Row-wise Sinusoidal</a:t>
                       </a:r>
                     </a:p>
                   </a:txBody>
@@ -32365,7 +32365,7 @@
                           </a:solidFill>
                           <a:latin typeface="Aptos"/>
                         </a:rPr>
-                        <a:t>ViT Column-wise</a:t>
+                        <a:t>ViT Column-wise Sinusoidal</a:t>
                       </a:r>
                     </a:p>
                   </a:txBody>
@@ -32583,7 +32583,7 @@
                           </a:solidFill>
                           <a:latin typeface="Aptos"/>
                         </a:rPr>
-                        <a:t>ViT Additive</a:t>
+                        <a:t>ViT Additive Sinusoidal</a:t>
                       </a:r>
                     </a:p>
                   </a:txBody>
@@ -32801,7 +32801,7 @@
                           </a:solidFill>
                           <a:latin typeface="Aptos"/>
                         </a:rPr>
-                        <a:t>ViT Additive Shifted</a:t>
+                        <a:t>ViT Additive Sinusoidal Shifted</a:t>
                       </a:r>
                     </a:p>
                   </a:txBody>
@@ -33019,7 +33019,7 @@
                           </a:solidFill>
                           <a:latin typeface="Aptos"/>
                         </a:rPr>
-                        <a:t>ViT Multiplicative</a:t>
+                        <a:t>ViT Multiplicative Sinusoidal</a:t>
                       </a:r>
                     </a:p>
                   </a:txBody>
@@ -33779,7 +33779,7 @@
                           </a:solidFill>
                           <a:latin typeface="Aptos"/>
                         </a:rPr>
-                        <a:t>ViT Multiplicative Shifted</a:t>
+                        <a:t>ViT Multiplicative Sinusoidal Shifted</a:t>
                       </a:r>
                     </a:p>
                   </a:txBody>
@@ -34373,7 +34373,7 @@
                           </a:solidFill>
                           <a:latin typeface="Aptos"/>
                         </a:rPr>
-                        <a:t>ViT No Pos</a:t>
+                        <a:t>ViT Baseline (No Pos)</a:t>
                       </a:r>
                     </a:p>
                   </a:txBody>
@@ -34400,7 +34400,7 @@
                           </a:solidFill>
                           <a:latin typeface="Aptos"/>
                         </a:rPr>
-                        <a:t>ViT Baseline</a:t>
+                        <a:t>ViT Learnable Position</a:t>
                       </a:r>
                     </a:p>
                   </a:txBody>
@@ -34427,7 +34427,7 @@
                           </a:solidFill>
                           <a:latin typeface="Aptos"/>
                         </a:rPr>
-                        <a:t>ViT Row-wise</a:t>
+                        <a:t>ViT Row-wise Sinusoidal</a:t>
                       </a:r>
                     </a:p>
                   </a:txBody>
@@ -34454,7 +34454,7 @@
                           </a:solidFill>
                           <a:latin typeface="Aptos"/>
                         </a:rPr>
-                        <a:t>ViT Column-wise</a:t>
+                        <a:t>ViT Column-wise Sinusoidal</a:t>
                       </a:r>
                     </a:p>
                   </a:txBody>
